--- a/it/slides/18-Architettura_dei_Calcolatori-Processore-Codice.pptx
+++ b/it/slides/18-Architettura_dei_Calcolatori-Processore-Codice.pptx
@@ -121,20 +121,28 @@
   <p:extLst>
     <p:ext uri="{521415D9-36F7-43E2-AB2F-B90AF26B5E84}">
       <p14:sectionLst xmlns:p14="http://schemas.microsoft.com/office/powerpoint/2010/main">
-        <p14:section name="Apertura" id="{8be61074-20b5-478f-5452-48d167b6a7d5}">
+        <p14:section name="Apertura" id="{5d7def41-2231-3f5c-6dfb-735256efa0ba}">
           <p14:sldIdLst>
             <p14:sldId id="256"/>
             <p14:sldId id="257"/>
           </p14:sldIdLst>
         </p14:section>
-        <p14:section name="I listati" id="{90039079-c1e6-982b-057c-c0f4d6760320}">
+        <p14:section name="Riscaldamento sulla macchina" id="{5f4f6a5b-0d3a-4c07-70da-571469df4cfd}">
           <p14:sldIdLst>
             <p14:sldId id="258"/>
+          </p14:sldIdLst>
+        </p14:section>
+        <p14:section name="Lo stack" id="{2465ee82-3b34-ef45-6796-08bac25fd3fb}">
+          <p14:sldIdLst>
             <p14:sldId id="259"/>
+          </p14:sldIdLst>
+        </p14:section>
+        <p14:section name="Modelli di processore" id="{9a15fa57-9bab-a544-e036-483e40148e02}">
+          <p14:sldIdLst>
             <p14:sldId id="260"/>
           </p14:sldIdLst>
         </p14:section>
-        <p14:section name="Il programma completo" id="{a54b6148-0adf-90d4-075a-e932dda1ef69}">
+        <p14:section name="Il programma completo" id="{b61fbf19-f67a-07c7-ae57-60f0c621e70b}">
           <p14:sldIdLst>
             <p14:sldId id="261"/>
             <p14:sldId id="262"/>
@@ -142,7 +150,7 @@
             <p14:sldId id="264"/>
           </p14:sldIdLst>
         </p14:section>
-        <p14:section name="Eseguire e provare" id="{e01539ea-2e54-09d4-a490-3442027751f3}">
+        <p14:section name="Eseguire e provare" id="{bd50bae2-233f-0c16-8511-825dcd323723}">
           <p14:sldIdLst>
             <p14:sldId id="265"/>
             <p14:sldId id="266"/>
@@ -151,7 +159,7 @@
             <p14:sldId id="269"/>
           </p14:sldIdLst>
         </p14:section>
-        <p14:section name="Esercizi" id="{6c70d243-3e58-3030-2de9-e0a127893f72}">
+        <p14:section name="Esercizi" id="{3b093da3-7e38-8443-14ef-f2d6261afdfc}">
           <p14:sldIdLst>
             <p14:sldId id="270"/>
           </p14:sldIdLst>
@@ -2780,7 +2788,63 @@
       </p:sp>
       <p:sp>
         <p:nvSpPr>
-          <p:cNvPr id="11" name="Shape 9"/>
+          <p:cNvPr id="11" name="Text 9"/>
+          <p:cNvSpPr txBox="1"/>
+          <p:nvPr/>
+        </p:nvSpPr>
+        <p:spPr>
+          <a:xfrm>
+            <a:off x="4693615" y="566928"/>
+            <a:ext cx="6949440" cy="640080"/>
+          </a:xfrm>
+          <a:prstGeom prst="rect">
+            <a:avLst/>
+          </a:prstGeom>
+          <a:noFill/>
+          <a:ln/>
+        </p:spPr>
+        <p:txBody>
+          <a:bodyPr wrap="square" lIns="0" tIns="0" rIns="0" bIns="0" rtlCol="0" anchor="t"/>
+          <a:lstStyle/>
+          <a:p>
+            <a:pPr algn="r" indent="0" marL="0">
+              <a:buNone/>
+            </a:pPr>
+            <a:r>
+              <a:rPr lang="en-US" sz="1300" dirty="0">
+                <a:solidFill>
+                  <a:srgbClr val="CFE3EA"/>
+                </a:solidFill>
+                <a:latin typeface="Calibri" pitchFamily="34" charset="0"/>
+                <a:ea typeface="Calibri" pitchFamily="34" charset="-122"/>
+                <a:cs typeface="Calibri" pitchFamily="34" charset="-120"/>
+              </a:rPr>
+              <a:t>Presentazione del codice. I concetti, le figure e le domande sono nella presentazione della lezione:</a:t>
+            </a:r>
+            <a:endParaRPr lang="en-US" sz="1300" dirty="0"/>
+          </a:p>
+          <a:p>
+            <a:pPr algn="r" indent="0" marL="0">
+              <a:buNone/>
+            </a:pPr>
+            <a:r>
+              <a:rPr lang="en-US" sz="1300" dirty="0">
+                <a:solidFill>
+                  <a:srgbClr val="CFE3EA"/>
+                </a:solidFill>
+                <a:latin typeface="Calibri" pitchFamily="34" charset="0"/>
+                <a:ea typeface="Calibri" pitchFamily="34" charset="-122"/>
+                <a:cs typeface="Calibri" pitchFamily="34" charset="-120"/>
+              </a:rPr>
+              <a:t>18-Architettura_dei_Calcolatori-Processore.pptx</a:t>
+            </a:r>
+            <a:endParaRPr lang="en-US" sz="1300" dirty="0"/>
+          </a:p>
+        </p:txBody>
+      </p:sp>
+      <p:sp>
+        <p:nvSpPr>
+          <p:cNvPr id="12" name="Shape 10"/>
           <p:cNvSpPr/>
           <p:nvPr/>
         </p:nvSpPr>
@@ -2807,7 +2871,7 @@
       </p:sp>
       <p:pic>
         <p:nvPicPr>
-          <p:cNvPr id="12" name="Image 0" descr="/Users/raffaelemontella/devel/riscv-prg32/computer-architecture-with-prg32/tools/assets/prg32qt_debugger.png">    </p:cNvPr>
+          <p:cNvPr id="13" name="Image 0" descr="/Users/raffaelemontella/devel/riscv-prg32/computer-architecture-with-prg32/tools/assets/prg32qt_debugger.png">    </p:cNvPr>
           <p:cNvPicPr>
             <a:picLocks noChangeAspect="1"/>
           </p:cNvPicPr>

--- a/it/slides/18-Architettura_dei_Calcolatori-Processore-Codice.pptx
+++ b/it/slides/18-Architettura_dei_Calcolatori-Processore-Codice.pptx
@@ -121,28 +121,28 @@
   <p:extLst>
     <p:ext uri="{521415D9-36F7-43E2-AB2F-B90AF26B5E84}">
       <p14:sectionLst xmlns:p14="http://schemas.microsoft.com/office/powerpoint/2010/main">
-        <p14:section name="Apertura" id="{5d7def41-2231-3f5c-6dfb-735256efa0ba}">
+        <p14:section name="Apertura" id="{98861ad1-de09-f881-d701-55498a20c096}">
           <p14:sldIdLst>
             <p14:sldId id="256"/>
             <p14:sldId id="257"/>
           </p14:sldIdLst>
         </p14:section>
-        <p14:section name="Riscaldamento sulla macchina" id="{5f4f6a5b-0d3a-4c07-70da-571469df4cfd}">
+        <p14:section name="Riscaldamento sulla macchina" id="{1666ccdf-dfde-03a0-9b6f-5c7f7b330fa7}">
           <p14:sldIdLst>
             <p14:sldId id="258"/>
           </p14:sldIdLst>
         </p14:section>
-        <p14:section name="Lo stack" id="{2465ee82-3b34-ef45-6796-08bac25fd3fb}">
+        <p14:section name="Lo stack" id="{e37c5f0b-ef5c-f5f3-96ac-5ed5faf0859e}">
           <p14:sldIdLst>
             <p14:sldId id="259"/>
           </p14:sldIdLst>
         </p14:section>
-        <p14:section name="Modelli di processore" id="{9a15fa57-9bab-a544-e036-483e40148e02}">
+        <p14:section name="Modelli di processore" id="{31190c9f-bbf8-c31b-db5a-9e466a936146}">
           <p14:sldIdLst>
             <p14:sldId id="260"/>
           </p14:sldIdLst>
         </p14:section>
-        <p14:section name="Il programma completo" id="{b61fbf19-f67a-07c7-ae57-60f0c621e70b}">
+        <p14:section name="Il programma completo" id="{55dcce45-7b35-5666-6e01-69d66bbc8ef7}">
           <p14:sldIdLst>
             <p14:sldId id="261"/>
             <p14:sldId id="262"/>
@@ -150,7 +150,7 @@
             <p14:sldId id="264"/>
           </p14:sldIdLst>
         </p14:section>
-        <p14:section name="Eseguire e provare" id="{bd50bae2-233f-0c16-8511-825dcd323723}">
+        <p14:section name="Eseguire e provare" id="{d98f09b5-5945-aafb-e4b4-d10dd97da0cd}">
           <p14:sldIdLst>
             <p14:sldId id="265"/>
             <p14:sldId id="266"/>
@@ -159,7 +159,7 @@
             <p14:sldId id="269"/>
           </p14:sldIdLst>
         </p14:section>
-        <p14:section name="Esercizi" id="{3b093da3-7e38-8443-14ef-f2d6261afdfc}">
+        <p14:section name="Esercizi" id="{91298611-06b8-9aff-62a1-732d079e59e2}">
           <p14:sldIdLst>
             <p14:sldId id="270"/>
           </p14:sldIdLst>
@@ -568,7 +568,9 @@
           <a:p>
             <a:r>
               <a:rPr lang="en-US" dirty="0"/>
-              <a:t>Questa è la presentazione del codice della Lezione 18. La presentazione della lezione contiene i concetti; questa contiene tutto ciò che si scrive e si esegue: i listati con la loro spiegazione, il programma completo, che cosa mostra, e il modo di provarlo su ciascuno dei tre host.</a:t>
+              <a:t>Questa è la presentazione del codice della Lezione 18. La presentazione della lezione contiene i concetti; questa contiene tutto ciò che si scrive e si esegue: i listati con la loro spiegazione, il programma completo, che cosa mostra, e il modo di provarlo su ciascuno dei tre host.
+Stato di apprendimento: DA COMPRENDERE OGGI, alla fine di questa lezione lo spiegate, lo seguite passo passo e lo applicate da soli; DA UTILIZZARE OGGI, oggi seguite e usate la ricetta; come funziona dentro si spiega più avanti, o non fa parte del corso; DA COMPRENDERE PIÙ AVANTI, riconoscete il nome e lo scopo; lo spiega una lezione successiva. Una slide senza etichetta è contesto: una storia, un esempio, una domanda, un esercizio.
+Stato di apprendimento di questa lezione. DA COMPRENDERE OGGI: accumulatore, pila, registri; il modello del processore; i registri di RISC-V; la convenzione di chiamata; la pila; il processore RV32. DA UTILIZZARE OGGI: il programma completo, gli strumenti di PRG32 (si usa, non si studia, in questo corso). DA COMPRENDERE PIÙ AVANTI: interruzioni e trap (Lezione 19). Una slide senza etichetta è contesto: una storia, un esempio, una domanda, un esercizio.</a:t>
             </a:r>
             <a:endParaRPr lang="en-US" dirty="0"/>
           </a:p>
@@ -746,6 +748,7 @@
             <a:r>
               <a:rPr lang="en-US" dirty="0"/>
               <a:t>La via più rapida: PRG32-QT sul vostro computer. Quattro passi, ciascuno con il suo comando. PRG32-QT si comporta come una scheda sulla porta 8080, ed è per questo che il comando di caricamento dice esp32c6. Con la modalità debug abilitata potete fermarvi su qualsiasi istruzione e leggere registri e memoria.
+DA UTILIZZARE OGGI: gli strumenti di PRG32 (si usa, non si studia, in questo corso).
 Per il docente: Eseguito dai test: la cartuccia di questa slide è compilata con questo comando ed eseguita sull'esecutore senza interfaccia di PRG32-QT. Senza la toolchain: importate il file .prg32 in PRG32-QT e scegliete Run Cartridge. Tasti: frecce o WASD per il joystick, Z o J per A, X o K per B, Invio per Start, Esc per tornare a Setup.</a:t>
             </a:r>
             <a:endParaRPr lang="en-US" dirty="0"/>
@@ -835,6 +838,7 @@
             <a:r>
               <a:rPr lang="en-US" dirty="0"/>
               <a:t>Lo stesso programma sull'emulatore. QEMU esegue il firmware vero su un chip emulato, quindi la cartuccia va compilata per l'architettura qemu. Caricate la cartuccia mentre QEMU è chiuso. Il firmware si apre sul menu Setup: scegliete Run Cartridge e lo slot. Ricordate che la tastiera è letta dal terminale, non dalla finestra con l'immagine.
+DA UTILIZZARE OGGI: gli strumenti di PRG32 (si usa, non si studia, in questo corso).
 Per il docente: Verificato dai test fino al caricamento: la cartuccia è compilata per l'architettura qemu e accettata nell'immagine flash dell'emulatore. Ciò che l'emulatore poi mostra non è verificato automaticamente: il QEMU di Espressif ha bisogno della sua finestra. Dall'ottobre 2026 il firmware parte da Setup: scegliete Run Cartridge, poi cart0.</a:t>
             </a:r>
             <a:endParaRPr lang="en-US" dirty="0"/>
@@ -924,6 +928,7 @@
             <a:r>
               <a:rPr lang="en-US" dirty="0"/>
               <a:t>Lo stesso programma sul kit. Il firmware si scrive una volta, via USB; dopo, le cartucce viaggiano sul Wi-Fi. Il comando di caricamento è quello usato per PRG32-QT con l'indirizzo della scheda. È l'unico host che i test automatici non eseguono: provatelo, e riferite ciò che vedete.
+DA UTILIZZARE OGGI: gli strumenti di PRG32 (si usa, non si studia, in questo corso).
 Per il docente: Non eseguito dai test: sulla macchina di prova non c'è una scheda. La cartuccia per l'architettura esp32c6 è compilata dai test; i passi sono quelli della documentazione di PRG32. Se la porta seriale non viene trovata, passatela esplicitamente. Per usare il Wi-Fi dell'aula: python3 -m prg32 wifi set --ssid NOME --password PASSWORD --mode sta.</a:t>
             </a:r>
             <a:endParaRPr lang="en-US" dirty="0"/>
@@ -1013,6 +1018,7 @@
             <a:r>
               <a:rPr lang="en-US" dirty="0"/>
               <a:t>I cinque sintomi più comuni, che cosa significa ciascuno, e che cosa fare. Leggete il messaggio prima di cambiare qualcosa: quasi sempre nomina la causa.
+DA UTILIZZARE OGGI: gli strumenti di PRG32 (si usa, non si studia, in questo corso).
 Per il docente: Le prime tre righe coprono la maggior parte dei casi. Quando chiedete aiuto, incollate il comando e l'intero messaggio come testo. docs/usage/troubleshooting.md del repository di PRG32 ha l'elenco completo.</a:t>
             </a:r>
             <a:endParaRPr lang="en-US" dirty="0"/>
@@ -1280,6 +1286,7 @@
             <a:r>
               <a:rPr lang="en-US" dirty="0"/>
               <a:t>Per calcolare z = x + y il programma carica x in un registro, carica y in un altro, somma i due registri in un terzo, e memorizza il risultato in z. Sette righe per una somma. La memoria è toccata solo da lw e sw; l'aritmetica avviene solo tra registri. Altri processori fanno lo stesso lavoro con tre istruzioni, o con una. Perché RISC-V è fatto così? Per rispondere servono un modello di che cos'è un processore, e poi un confronto tra modi diversi di costruirne uno.
+DA COMPRENDERE OGGI: accumulatore, pila, registri.
 Per il docente: Il ciclo load-modify-store della Lezione 02, visto ora come scelta di progetto. Tenere a mente i tre indirizzi: lo stesso calcolo ritorna nel confronto tra i modelli di processore.</a:t>
             </a:r>
             <a:endParaRPr lang="en-US" dirty="0"/>
@@ -1369,6 +1376,7 @@
             <a:r>
               <a:rPr lang="en-US" dirty="0"/>
               <a:t>In RISC-V il puntatore allo stack sp contiene l'indirizzo dell'ultima locazione occupata, e lo stack cresce verso gli indirizzi bassi. Un push sono due istruzioni: si sottrae 4 da sp, poi si memorizza sulla nuova cima. Un pop è il contrario: si carica dalla cima, poi si somma 4. La tabella confronta tre processori: a RISC-V servono due istruzioni, al 68000 un'istruzione con un modo di indirizzamento speciale, a x86 un'istruzione dedicata. In pratica una funzione RISC-V alloca il suo intero frame in una volta, come fate dalla Lezione 02.
+DA COMPRENDERE OGGI: la pila; la convenzione di chiamata.
 Per il docente: I valori sono quelli disegnati nella presentazione originale. RISC-V non ha push e pop: un frame di stack si alloca una volta per funzione, sedici byte alla volta, e si riempie con normali store (Lezione 02). La forma del 68000 MOVE (SP)+, D0 estrae con un postincremento.</a:t>
             </a:r>
             <a:endParaRPr lang="en-US" dirty="0"/>
@@ -1458,6 +1466,7 @@
             <a:r>
               <a:rPr lang="en-US" dirty="0"/>
               <a:t>La somma del riscaldamento in quattro macchine. La macchina ad accumulatore: carica x, somma y, memorizza z. La macchina a stack: push di x, push di y, somma, pop in z. Una macchina a registri con operandi in memoria: sposta x in un registro, vi somma y, sposta il registro in z. RISC-V: due load, una somma tra registri, uno store. Gli accessi alla memoria sono tre in tutti i casi. Cambia il numero di istruzioni e quanto fa ciascuna: in RISC-V ognuna fa una cosa sola.
+DA COMPRENDERE OGGI: accumulatore, pila, registri.
 Per il docente: Gli stessi tre accessi alla memoria ovunque: cambia quante sono le istruzioni e quanto è complessa ciascuna. Nel modello registro-memoria un'istruzione come ADD y, D0 legge la memoria e calcola; nel modello load-store ogni istruzione fa una cosa sola. Le macchine a stack con lo stack in memoria sono in genere più lente di quelle a registri generici. lw t1, x è una forma abbreviata che l'assemblatore accetta per la coppia la e lw del riscaldamento.</a:t>
             </a:r>
             <a:endParaRPr lang="en-US" dirty="0"/>
@@ -1547,6 +1556,7 @@
             <a:r>
               <a:rPr lang="en-US" dirty="0"/>
               <a:t>Una pagina del programma completo, esattamente com'è nel repository. Leggetelo dall'inizio: l'intestazione dice che cosa mostra il programma e come compilarlo; seguono le tre funzioni init, update e draw, poi i dati. Le righe incontrate nei listati della lezione hanno qui gli stessi commenti.
+DA UTILIZZARE OGGI: il programma completo (si usa, non si studia, in questo corso).
 Per il docente: code/l18.S, come viene compilato ed eseguito dai test. I commenti fanno parte del programma, e sono in inglese come in tutti i listati: leggeteli con il codice.</a:t>
             </a:r>
             <a:endParaRPr lang="en-US" dirty="0"/>
@@ -1636,6 +1646,7 @@
             <a:r>
               <a:rPr lang="en-US" dirty="0"/>
               <a:t>Una pagina del programma completo, esattamente com'è nel repository. Leggetelo dall'inizio: l'intestazione dice che cosa mostra il programma e come compilarlo; seguono le tre funzioni init, update e draw, poi i dati. Le righe incontrate nei listati della lezione hanno qui gli stessi commenti.
+DA UTILIZZARE OGGI: il programma completo (si usa, non si studia, in questo corso).
 Per il docente: code/l18.S, come viene compilato ed eseguito dai test. I commenti fanno parte del programma, e sono in inglese come in tutti i listati: leggeteli con il codice.</a:t>
             </a:r>
             <a:endParaRPr lang="en-US" dirty="0"/>
@@ -1725,6 +1736,7 @@
             <a:r>
               <a:rPr lang="en-US" dirty="0"/>
               <a:t>Una pagina del programma completo, esattamente com'è nel repository. Leggetelo dall'inizio: l'intestazione dice che cosa mostra il programma e come compilarlo; seguono le tre funzioni init, update e draw, poi i dati. Le righe incontrate nei listati della lezione hanno qui gli stessi commenti.
+DA UTILIZZARE OGGI: il programma completo (si usa, non si studia, in questo corso).
 Per il docente: code/l18.S, come viene compilato ed eseguito dai test. I commenti fanno parte del programma, e sono in inglese come in tutti i listati: leggeteli con il codice.</a:t>
             </a:r>
             <a:endParaRPr lang="en-US" dirty="0"/>
@@ -1814,6 +1826,7 @@
             <a:r>
               <a:rPr lang="en-US" dirty="0"/>
               <a:t>Una pagina del programma completo, esattamente com'è nel repository. Leggetelo dall'inizio: l'intestazione dice che cosa mostra il programma e come compilarlo; seguono le tre funzioni init, update e draw, poi i dati. Le righe incontrate nei listati della lezione hanno qui gli stessi commenti.
+DA UTILIZZARE OGGI: il programma completo (si usa, non si studia, in questo corso).
 Per il docente: code/l18.S, come viene compilato ed eseguito dai test. I commenti fanno parte del programma, e sono in inglese come in tutti i listati: leggeteli con il codice.</a:t>
             </a:r>
             <a:endParaRPr lang="en-US" dirty="0"/>
@@ -2895,6 +2908,420 @@
       </p:pic>
       <p:sp>
         <p:nvSpPr>
+          <p:cNvPr id="14" name="Shape 11"/>
+          <p:cNvSpPr/>
+          <p:nvPr/>
+        </p:nvSpPr>
+        <p:spPr>
+          <a:xfrm>
+            <a:off x="8910777" y="91440"/>
+            <a:ext cx="2732278" cy="274320"/>
+          </a:xfrm>
+          <a:prstGeom prst="rect">
+            <a:avLst/>
+          </a:prstGeom>
+          <a:solidFill>
+            <a:srgbClr val="F3E8FF"/>
+          </a:solidFill>
+          <a:ln w="12700">
+            <a:solidFill>
+              <a:srgbClr val="7E22CE"/>
+            </a:solidFill>
+            <a:prstDash val="dash"/>
+          </a:ln>
+        </p:spPr>
+      </p:sp>
+      <p:sp>
+        <p:nvSpPr>
+          <p:cNvPr id="15" name="Shape 12"/>
+          <p:cNvSpPr/>
+          <p:nvPr/>
+        </p:nvSpPr>
+        <p:spPr>
+          <a:xfrm>
+            <a:off x="8938209" y="128016"/>
+            <a:ext cx="45720" cy="45720"/>
+          </a:xfrm>
+          <a:prstGeom prst="rect">
+            <a:avLst/>
+          </a:prstGeom>
+          <a:solidFill>
+            <a:srgbClr val="7E22CE"/>
+          </a:solidFill>
+          <a:ln w="12700">
+            <a:solidFill>
+              <a:srgbClr val="7E22CE"/>
+            </a:solidFill>
+            <a:prstDash val="solid"/>
+          </a:ln>
+        </p:spPr>
+      </p:sp>
+      <p:sp>
+        <p:nvSpPr>
+          <p:cNvPr id="16" name="Shape 13"/>
+          <p:cNvSpPr/>
+          <p:nvPr/>
+        </p:nvSpPr>
+        <p:spPr>
+          <a:xfrm>
+            <a:off x="8938209" y="205740"/>
+            <a:ext cx="45720" cy="45720"/>
+          </a:xfrm>
+          <a:prstGeom prst="rect">
+            <a:avLst/>
+          </a:prstGeom>
+          <a:solidFill>
+            <a:srgbClr val="7E22CE"/>
+          </a:solidFill>
+          <a:ln w="12700">
+            <a:solidFill>
+              <a:srgbClr val="7E22CE"/>
+            </a:solidFill>
+            <a:prstDash val="solid"/>
+          </a:ln>
+        </p:spPr>
+      </p:sp>
+      <p:sp>
+        <p:nvSpPr>
+          <p:cNvPr id="17" name="Shape 14"/>
+          <p:cNvSpPr/>
+          <p:nvPr/>
+        </p:nvSpPr>
+        <p:spPr>
+          <a:xfrm>
+            <a:off x="8938209" y="283464"/>
+            <a:ext cx="45720" cy="45720"/>
+          </a:xfrm>
+          <a:prstGeom prst="rect">
+            <a:avLst/>
+          </a:prstGeom>
+          <a:solidFill>
+            <a:srgbClr val="7E22CE"/>
+          </a:solidFill>
+          <a:ln w="12700">
+            <a:solidFill>
+              <a:srgbClr val="7E22CE"/>
+            </a:solidFill>
+            <a:prstDash val="solid"/>
+          </a:ln>
+        </p:spPr>
+      </p:sp>
+      <p:pic>
+        <p:nvPicPr>
+          <p:cNvPr id="18" name="Image 1" descr="preencoded.png">    </p:cNvPr>
+          <p:cNvPicPr>
+            <a:picLocks noChangeAspect="1"/>
+          </p:cNvPicPr>
+          <p:nvPr/>
+        </p:nvPicPr>
+        <p:blipFill>
+          <a:blip r:embed="rId2"/>
+          <a:stretch>
+            <a:fillRect/>
+          </a:stretch>
+        </p:blipFill>
+        <p:spPr>
+          <a:xfrm>
+            <a:off x="9038793" y="128016"/>
+            <a:ext cx="201168" cy="201168"/>
+          </a:xfrm>
+          <a:prstGeom prst="rect">
+            <a:avLst/>
+          </a:prstGeom>
+        </p:spPr>
+      </p:pic>
+      <p:sp>
+        <p:nvSpPr>
+          <p:cNvPr id="19" name="Text 15"/>
+          <p:cNvSpPr txBox="1"/>
+          <p:nvPr/>
+        </p:nvSpPr>
+        <p:spPr>
+          <a:xfrm>
+            <a:off x="9294825" y="91440"/>
+            <a:ext cx="2311654" cy="274320"/>
+          </a:xfrm>
+          <a:prstGeom prst="rect">
+            <a:avLst/>
+          </a:prstGeom>
+          <a:noFill/>
+          <a:ln/>
+        </p:spPr>
+        <p:txBody>
+          <a:bodyPr wrap="square" lIns="0" tIns="0" rIns="0" bIns="0" rtlCol="0" anchor="ctr"/>
+          <a:lstStyle/>
+          <a:p>
+            <a:pPr indent="0" marL="0">
+              <a:buNone/>
+            </a:pPr>
+            <a:r>
+              <a:rPr lang="en-US" sz="1100" b="1" dirty="0">
+                <a:solidFill>
+                  <a:srgbClr val="6B21A8"/>
+                </a:solidFill>
+                <a:latin typeface="Calibri" pitchFamily="34" charset="0"/>
+                <a:ea typeface="Calibri" pitchFamily="34" charset="-122"/>
+                <a:cs typeface="Calibri" pitchFamily="34" charset="-120"/>
+              </a:rPr>
+              <a:t>DA COMPRENDERE PIÙ AVANTI</a:t>
+            </a:r>
+            <a:endParaRPr lang="en-US" sz="1100" dirty="0"/>
+          </a:p>
+        </p:txBody>
+      </p:sp>
+      <p:sp>
+        <p:nvSpPr>
+          <p:cNvPr id="20" name="Shape 16"/>
+          <p:cNvSpPr/>
+          <p:nvPr/>
+        </p:nvSpPr>
+        <p:spPr>
+          <a:xfrm>
+            <a:off x="6675069" y="91440"/>
+            <a:ext cx="2125980" cy="274320"/>
+          </a:xfrm>
+          <a:prstGeom prst="rect">
+            <a:avLst/>
+          </a:prstGeom>
+          <a:solidFill>
+            <a:srgbClr val="FEF3C7"/>
+          </a:solidFill>
+          <a:ln w="12700">
+            <a:solidFill>
+              <a:srgbClr val="B45309"/>
+            </a:solidFill>
+            <a:prstDash val="solid"/>
+          </a:ln>
+        </p:spPr>
+      </p:sp>
+      <p:sp>
+        <p:nvSpPr>
+          <p:cNvPr id="21" name="Shape 17"/>
+          <p:cNvSpPr/>
+          <p:nvPr/>
+        </p:nvSpPr>
+        <p:spPr>
+          <a:xfrm>
+            <a:off x="6675069" y="91440"/>
+            <a:ext cx="27432" cy="274320"/>
+          </a:xfrm>
+          <a:prstGeom prst="rect">
+            <a:avLst/>
+          </a:prstGeom>
+          <a:solidFill>
+            <a:srgbClr val="B45309"/>
+          </a:solidFill>
+          <a:ln w="12700">
+            <a:solidFill>
+              <a:srgbClr val="B45309"/>
+            </a:solidFill>
+            <a:prstDash val="solid"/>
+          </a:ln>
+        </p:spPr>
+      </p:sp>
+      <p:sp>
+        <p:nvSpPr>
+          <p:cNvPr id="22" name="Shape 18"/>
+          <p:cNvSpPr/>
+          <p:nvPr/>
+        </p:nvSpPr>
+        <p:spPr>
+          <a:xfrm>
+            <a:off x="6729933" y="91440"/>
+            <a:ext cx="27432" cy="274320"/>
+          </a:xfrm>
+          <a:prstGeom prst="rect">
+            <a:avLst/>
+          </a:prstGeom>
+          <a:solidFill>
+            <a:srgbClr val="B45309"/>
+          </a:solidFill>
+          <a:ln w="12700">
+            <a:solidFill>
+              <a:srgbClr val="B45309"/>
+            </a:solidFill>
+            <a:prstDash val="solid"/>
+          </a:ln>
+        </p:spPr>
+      </p:sp>
+      <p:pic>
+        <p:nvPicPr>
+          <p:cNvPr id="23" name="Image 2" descr="preencoded.png">    </p:cNvPr>
+          <p:cNvPicPr>
+            <a:picLocks noChangeAspect="1"/>
+          </p:cNvPicPr>
+          <p:nvPr/>
+        </p:nvPicPr>
+        <p:blipFill>
+          <a:blip r:embed="rId3"/>
+          <a:stretch>
+            <a:fillRect/>
+          </a:stretch>
+        </p:blipFill>
+        <p:spPr>
+          <a:xfrm>
+            <a:off x="6803085" y="128016"/>
+            <a:ext cx="201168" cy="201168"/>
+          </a:xfrm>
+          <a:prstGeom prst="rect">
+            <a:avLst/>
+          </a:prstGeom>
+        </p:spPr>
+      </p:pic>
+      <p:sp>
+        <p:nvSpPr>
+          <p:cNvPr id="24" name="Text 19"/>
+          <p:cNvSpPr txBox="1"/>
+          <p:nvPr/>
+        </p:nvSpPr>
+        <p:spPr>
+          <a:xfrm>
+            <a:off x="7059117" y="91440"/>
+            <a:ext cx="1705356" cy="274320"/>
+          </a:xfrm>
+          <a:prstGeom prst="rect">
+            <a:avLst/>
+          </a:prstGeom>
+          <a:noFill/>
+          <a:ln/>
+        </p:spPr>
+        <p:txBody>
+          <a:bodyPr wrap="square" lIns="0" tIns="0" rIns="0" bIns="0" rtlCol="0" anchor="ctr"/>
+          <a:lstStyle/>
+          <a:p>
+            <a:pPr indent="0" marL="0">
+              <a:buNone/>
+            </a:pPr>
+            <a:r>
+              <a:rPr lang="en-US" sz="1100" b="1" dirty="0">
+                <a:solidFill>
+                  <a:srgbClr val="92400E"/>
+                </a:solidFill>
+                <a:latin typeface="Calibri" pitchFamily="34" charset="0"/>
+                <a:ea typeface="Calibri" pitchFamily="34" charset="-122"/>
+                <a:cs typeface="Calibri" pitchFamily="34" charset="-120"/>
+              </a:rPr>
+              <a:t>DA UTILIZZARE OGGI</a:t>
+            </a:r>
+            <a:endParaRPr lang="en-US" sz="1100" dirty="0"/>
+          </a:p>
+        </p:txBody>
+      </p:sp>
+      <p:sp>
+        <p:nvSpPr>
+          <p:cNvPr id="25" name="Shape 20"/>
+          <p:cNvSpPr/>
+          <p:nvPr/>
+        </p:nvSpPr>
+        <p:spPr>
+          <a:xfrm>
+            <a:off x="4352747" y="91440"/>
+            <a:ext cx="2212594" cy="274320"/>
+          </a:xfrm>
+          <a:prstGeom prst="rect">
+            <a:avLst/>
+          </a:prstGeom>
+          <a:solidFill>
+            <a:srgbClr val="E0F2FE"/>
+          </a:solidFill>
+          <a:ln w="12700">
+            <a:solidFill>
+              <a:srgbClr val="0369A1"/>
+            </a:solidFill>
+            <a:prstDash val="solid"/>
+          </a:ln>
+        </p:spPr>
+      </p:sp>
+      <p:sp>
+        <p:nvSpPr>
+          <p:cNvPr id="26" name="Shape 21"/>
+          <p:cNvSpPr/>
+          <p:nvPr/>
+        </p:nvSpPr>
+        <p:spPr>
+          <a:xfrm>
+            <a:off x="4352747" y="91440"/>
+            <a:ext cx="73152" cy="274320"/>
+          </a:xfrm>
+          <a:prstGeom prst="rect">
+            <a:avLst/>
+          </a:prstGeom>
+          <a:solidFill>
+            <a:srgbClr val="0369A1"/>
+          </a:solidFill>
+          <a:ln w="12700">
+            <a:solidFill>
+              <a:srgbClr val="0369A1"/>
+            </a:solidFill>
+            <a:prstDash val="solid"/>
+          </a:ln>
+        </p:spPr>
+      </p:sp>
+      <p:pic>
+        <p:nvPicPr>
+          <p:cNvPr id="27" name="Image 3" descr="preencoded.png">    </p:cNvPr>
+          <p:cNvPicPr>
+            <a:picLocks noChangeAspect="1"/>
+          </p:cNvPicPr>
+          <p:nvPr/>
+        </p:nvPicPr>
+        <p:blipFill>
+          <a:blip r:embed="rId4"/>
+          <a:stretch>
+            <a:fillRect/>
+          </a:stretch>
+        </p:blipFill>
+        <p:spPr>
+          <a:xfrm>
+            <a:off x="4480763" y="128016"/>
+            <a:ext cx="201168" cy="201168"/>
+          </a:xfrm>
+          <a:prstGeom prst="rect">
+            <a:avLst/>
+          </a:prstGeom>
+        </p:spPr>
+      </p:pic>
+      <p:sp>
+        <p:nvSpPr>
+          <p:cNvPr id="28" name="Text 22"/>
+          <p:cNvSpPr txBox="1"/>
+          <p:nvPr/>
+        </p:nvSpPr>
+        <p:spPr>
+          <a:xfrm>
+            <a:off x="4736795" y="91440"/>
+            <a:ext cx="1791970" cy="274320"/>
+          </a:xfrm>
+          <a:prstGeom prst="rect">
+            <a:avLst/>
+          </a:prstGeom>
+          <a:noFill/>
+          <a:ln/>
+        </p:spPr>
+        <p:txBody>
+          <a:bodyPr wrap="square" lIns="0" tIns="0" rIns="0" bIns="0" rtlCol="0" anchor="ctr"/>
+          <a:lstStyle/>
+          <a:p>
+            <a:pPr indent="0" marL="0">
+              <a:buNone/>
+            </a:pPr>
+            <a:r>
+              <a:rPr lang="en-US" sz="1100" b="1" dirty="0">
+                <a:solidFill>
+                  <a:srgbClr val="075985"/>
+                </a:solidFill>
+                <a:latin typeface="Calibri" pitchFamily="34" charset="0"/>
+                <a:ea typeface="Calibri" pitchFamily="34" charset="-122"/>
+                <a:cs typeface="Calibri" pitchFamily="34" charset="-120"/>
+              </a:rPr>
+              <a:t>DA COMPRENDERE OGGI</a:t>
+            </a:r>
+            <a:endParaRPr lang="en-US" sz="1100" dirty="0"/>
+          </a:p>
+        </p:txBody>
+      </p:sp>
+      <p:sp>
+        <p:nvSpPr>
           <p:cNvPr id="25" name="Slide Number Placeholder 0"/>
           <p:cNvSpPr>
             <a:spLocks noGrp="1"/>
@@ -4048,6 +4475,158 @@
       </p:sp>
       <p:sp>
         <p:nvSpPr>
+          <p:cNvPr id="17" name="Shape 15"/>
+          <p:cNvSpPr/>
+          <p:nvPr/>
+        </p:nvSpPr>
+        <p:spPr>
+          <a:xfrm>
+            <a:off x="7875600" y="91440"/>
+            <a:ext cx="3767455" cy="274320"/>
+          </a:xfrm>
+          <a:prstGeom prst="rect">
+            <a:avLst/>
+          </a:prstGeom>
+          <a:solidFill>
+            <a:srgbClr val="FEF3C7"/>
+          </a:solidFill>
+          <a:ln w="12700">
+            <a:solidFill>
+              <a:srgbClr val="B45309"/>
+            </a:solidFill>
+            <a:prstDash val="solid"/>
+          </a:ln>
+        </p:spPr>
+      </p:sp>
+      <p:sp>
+        <p:nvSpPr>
+          <p:cNvPr id="18" name="Shape 16"/>
+          <p:cNvSpPr/>
+          <p:nvPr/>
+        </p:nvSpPr>
+        <p:spPr>
+          <a:xfrm>
+            <a:off x="7875600" y="91440"/>
+            <a:ext cx="27432" cy="274320"/>
+          </a:xfrm>
+          <a:prstGeom prst="rect">
+            <a:avLst/>
+          </a:prstGeom>
+          <a:solidFill>
+            <a:srgbClr val="B45309"/>
+          </a:solidFill>
+          <a:ln w="12700">
+            <a:solidFill>
+              <a:srgbClr val="B45309"/>
+            </a:solidFill>
+            <a:prstDash val="solid"/>
+          </a:ln>
+        </p:spPr>
+      </p:sp>
+      <p:sp>
+        <p:nvSpPr>
+          <p:cNvPr id="19" name="Shape 17"/>
+          <p:cNvSpPr/>
+          <p:nvPr/>
+        </p:nvSpPr>
+        <p:spPr>
+          <a:xfrm>
+            <a:off x="7930464" y="91440"/>
+            <a:ext cx="27432" cy="274320"/>
+          </a:xfrm>
+          <a:prstGeom prst="rect">
+            <a:avLst/>
+          </a:prstGeom>
+          <a:solidFill>
+            <a:srgbClr val="B45309"/>
+          </a:solidFill>
+          <a:ln w="12700">
+            <a:solidFill>
+              <a:srgbClr val="B45309"/>
+            </a:solidFill>
+            <a:prstDash val="solid"/>
+          </a:ln>
+        </p:spPr>
+      </p:sp>
+      <p:pic>
+        <p:nvPicPr>
+          <p:cNvPr id="20" name="Image 0" descr="preencoded.png">    </p:cNvPr>
+          <p:cNvPicPr>
+            <a:picLocks noChangeAspect="1"/>
+          </p:cNvPicPr>
+          <p:nvPr/>
+        </p:nvPicPr>
+        <p:blipFill>
+          <a:blip r:embed="rId1"/>
+          <a:stretch>
+            <a:fillRect/>
+          </a:stretch>
+        </p:blipFill>
+        <p:spPr>
+          <a:xfrm>
+            <a:off x="8003616" y="128016"/>
+            <a:ext cx="201168" cy="201168"/>
+          </a:xfrm>
+          <a:prstGeom prst="rect">
+            <a:avLst/>
+          </a:prstGeom>
+        </p:spPr>
+      </p:pic>
+      <p:sp>
+        <p:nvSpPr>
+          <p:cNvPr id="21" name="Text 18"/>
+          <p:cNvSpPr txBox="1"/>
+          <p:nvPr/>
+        </p:nvSpPr>
+        <p:spPr>
+          <a:xfrm>
+            <a:off x="8259648" y="91440"/>
+            <a:ext cx="3346831" cy="274320"/>
+          </a:xfrm>
+          <a:prstGeom prst="rect">
+            <a:avLst/>
+          </a:prstGeom>
+          <a:noFill/>
+          <a:ln/>
+        </p:spPr>
+        <p:txBody>
+          <a:bodyPr wrap="square" lIns="0" tIns="0" rIns="0" bIns="0" rtlCol="0" anchor="ctr"/>
+          <a:lstStyle/>
+          <a:p>
+            <a:pPr indent="0" marL="0">
+              <a:buNone/>
+            </a:pPr>
+            <a:r>
+              <a:rPr lang="en-US" sz="1100" b="1" dirty="0">
+                <a:solidFill>
+                  <a:srgbClr val="92400E"/>
+                </a:solidFill>
+                <a:latin typeface="Calibri" pitchFamily="34" charset="0"/>
+                <a:ea typeface="Calibri" pitchFamily="34" charset="-122"/>
+                <a:cs typeface="Calibri" pitchFamily="34" charset="-120"/>
+              </a:rPr>
+              <a:t>DA UTILIZZARE OGGI</a:t>
+            </a:r>
+            <a:pPr indent="0" marL="0">
+              <a:buNone/>
+            </a:pPr>
+            <a:r>
+              <a:rPr lang="en-US" sz="1100" dirty="0">
+                <a:solidFill>
+                  <a:srgbClr val="92400E"/>
+                </a:solidFill>
+                <a:latin typeface="Calibri" pitchFamily="34" charset="0"/>
+                <a:ea typeface="Calibri" pitchFamily="34" charset="-122"/>
+                <a:cs typeface="Calibri" pitchFamily="34" charset="-120"/>
+              </a:rPr>
+              <a:t> · gli strumenti di PRG32</a:t>
+            </a:r>
+            <a:endParaRPr lang="en-US" sz="1100" dirty="0"/>
+          </a:p>
+        </p:txBody>
+      </p:sp>
+      <p:sp>
+        <p:nvSpPr>
           <p:cNvPr id="25" name="Slide Number Placeholder 0"/>
           <p:cNvSpPr>
             <a:spLocks noGrp="1"/>
@@ -4884,6 +5463,158 @@
       </p:sp>
       <p:sp>
         <p:nvSpPr>
+          <p:cNvPr id="17" name="Shape 15"/>
+          <p:cNvSpPr/>
+          <p:nvPr/>
+        </p:nvSpPr>
+        <p:spPr>
+          <a:xfrm>
+            <a:off x="7875600" y="91440"/>
+            <a:ext cx="3767455" cy="274320"/>
+          </a:xfrm>
+          <a:prstGeom prst="rect">
+            <a:avLst/>
+          </a:prstGeom>
+          <a:solidFill>
+            <a:srgbClr val="FEF3C7"/>
+          </a:solidFill>
+          <a:ln w="12700">
+            <a:solidFill>
+              <a:srgbClr val="B45309"/>
+            </a:solidFill>
+            <a:prstDash val="solid"/>
+          </a:ln>
+        </p:spPr>
+      </p:sp>
+      <p:sp>
+        <p:nvSpPr>
+          <p:cNvPr id="18" name="Shape 16"/>
+          <p:cNvSpPr/>
+          <p:nvPr/>
+        </p:nvSpPr>
+        <p:spPr>
+          <a:xfrm>
+            <a:off x="7875600" y="91440"/>
+            <a:ext cx="27432" cy="274320"/>
+          </a:xfrm>
+          <a:prstGeom prst="rect">
+            <a:avLst/>
+          </a:prstGeom>
+          <a:solidFill>
+            <a:srgbClr val="B45309"/>
+          </a:solidFill>
+          <a:ln w="12700">
+            <a:solidFill>
+              <a:srgbClr val="B45309"/>
+            </a:solidFill>
+            <a:prstDash val="solid"/>
+          </a:ln>
+        </p:spPr>
+      </p:sp>
+      <p:sp>
+        <p:nvSpPr>
+          <p:cNvPr id="19" name="Shape 17"/>
+          <p:cNvSpPr/>
+          <p:nvPr/>
+        </p:nvSpPr>
+        <p:spPr>
+          <a:xfrm>
+            <a:off x="7930464" y="91440"/>
+            <a:ext cx="27432" cy="274320"/>
+          </a:xfrm>
+          <a:prstGeom prst="rect">
+            <a:avLst/>
+          </a:prstGeom>
+          <a:solidFill>
+            <a:srgbClr val="B45309"/>
+          </a:solidFill>
+          <a:ln w="12700">
+            <a:solidFill>
+              <a:srgbClr val="B45309"/>
+            </a:solidFill>
+            <a:prstDash val="solid"/>
+          </a:ln>
+        </p:spPr>
+      </p:sp>
+      <p:pic>
+        <p:nvPicPr>
+          <p:cNvPr id="20" name="Image 0" descr="preencoded.png">    </p:cNvPr>
+          <p:cNvPicPr>
+            <a:picLocks noChangeAspect="1"/>
+          </p:cNvPicPr>
+          <p:nvPr/>
+        </p:nvPicPr>
+        <p:blipFill>
+          <a:blip r:embed="rId1"/>
+          <a:stretch>
+            <a:fillRect/>
+          </a:stretch>
+        </p:blipFill>
+        <p:spPr>
+          <a:xfrm>
+            <a:off x="8003616" y="128016"/>
+            <a:ext cx="201168" cy="201168"/>
+          </a:xfrm>
+          <a:prstGeom prst="rect">
+            <a:avLst/>
+          </a:prstGeom>
+        </p:spPr>
+      </p:pic>
+      <p:sp>
+        <p:nvSpPr>
+          <p:cNvPr id="21" name="Text 18"/>
+          <p:cNvSpPr txBox="1"/>
+          <p:nvPr/>
+        </p:nvSpPr>
+        <p:spPr>
+          <a:xfrm>
+            <a:off x="8259648" y="91440"/>
+            <a:ext cx="3346831" cy="274320"/>
+          </a:xfrm>
+          <a:prstGeom prst="rect">
+            <a:avLst/>
+          </a:prstGeom>
+          <a:noFill/>
+          <a:ln/>
+        </p:spPr>
+        <p:txBody>
+          <a:bodyPr wrap="square" lIns="0" tIns="0" rIns="0" bIns="0" rtlCol="0" anchor="ctr"/>
+          <a:lstStyle/>
+          <a:p>
+            <a:pPr indent="0" marL="0">
+              <a:buNone/>
+            </a:pPr>
+            <a:r>
+              <a:rPr lang="en-US" sz="1100" b="1" dirty="0">
+                <a:solidFill>
+                  <a:srgbClr val="92400E"/>
+                </a:solidFill>
+                <a:latin typeface="Calibri" pitchFamily="34" charset="0"/>
+                <a:ea typeface="Calibri" pitchFamily="34" charset="-122"/>
+                <a:cs typeface="Calibri" pitchFamily="34" charset="-120"/>
+              </a:rPr>
+              <a:t>DA UTILIZZARE OGGI</a:t>
+            </a:r>
+            <a:pPr indent="0" marL="0">
+              <a:buNone/>
+            </a:pPr>
+            <a:r>
+              <a:rPr lang="en-US" sz="1100" dirty="0">
+                <a:solidFill>
+                  <a:srgbClr val="92400E"/>
+                </a:solidFill>
+                <a:latin typeface="Calibri" pitchFamily="34" charset="0"/>
+                <a:ea typeface="Calibri" pitchFamily="34" charset="-122"/>
+                <a:cs typeface="Calibri" pitchFamily="34" charset="-120"/>
+              </a:rPr>
+              <a:t> · gli strumenti di PRG32</a:t>
+            </a:r>
+            <a:endParaRPr lang="en-US" sz="1100" dirty="0"/>
+          </a:p>
+        </p:txBody>
+      </p:sp>
+      <p:sp>
+        <p:nvSpPr>
           <p:cNvPr id="25" name="Slide Number Placeholder 0"/>
           <p:cNvSpPr>
             <a:spLocks noGrp="1"/>
@@ -5713,6 +6444,158 @@
                 <a:cs typeface="Calibri" pitchFamily="34" charset="-120"/>
               </a:rPr>
               <a:t>Schermo nero: confrontate il cablaggio del display con il firmware</a:t>
+            </a:r>
+            <a:endParaRPr lang="en-US" sz="1100" dirty="0"/>
+          </a:p>
+        </p:txBody>
+      </p:sp>
+      <p:sp>
+        <p:nvSpPr>
+          <p:cNvPr id="17" name="Shape 15"/>
+          <p:cNvSpPr/>
+          <p:nvPr/>
+        </p:nvSpPr>
+        <p:spPr>
+          <a:xfrm>
+            <a:off x="7875600" y="91440"/>
+            <a:ext cx="3767455" cy="274320"/>
+          </a:xfrm>
+          <a:prstGeom prst="rect">
+            <a:avLst/>
+          </a:prstGeom>
+          <a:solidFill>
+            <a:srgbClr val="FEF3C7"/>
+          </a:solidFill>
+          <a:ln w="12700">
+            <a:solidFill>
+              <a:srgbClr val="B45309"/>
+            </a:solidFill>
+            <a:prstDash val="solid"/>
+          </a:ln>
+        </p:spPr>
+      </p:sp>
+      <p:sp>
+        <p:nvSpPr>
+          <p:cNvPr id="18" name="Shape 16"/>
+          <p:cNvSpPr/>
+          <p:nvPr/>
+        </p:nvSpPr>
+        <p:spPr>
+          <a:xfrm>
+            <a:off x="7875600" y="91440"/>
+            <a:ext cx="27432" cy="274320"/>
+          </a:xfrm>
+          <a:prstGeom prst="rect">
+            <a:avLst/>
+          </a:prstGeom>
+          <a:solidFill>
+            <a:srgbClr val="B45309"/>
+          </a:solidFill>
+          <a:ln w="12700">
+            <a:solidFill>
+              <a:srgbClr val="B45309"/>
+            </a:solidFill>
+            <a:prstDash val="solid"/>
+          </a:ln>
+        </p:spPr>
+      </p:sp>
+      <p:sp>
+        <p:nvSpPr>
+          <p:cNvPr id="19" name="Shape 17"/>
+          <p:cNvSpPr/>
+          <p:nvPr/>
+        </p:nvSpPr>
+        <p:spPr>
+          <a:xfrm>
+            <a:off x="7930464" y="91440"/>
+            <a:ext cx="27432" cy="274320"/>
+          </a:xfrm>
+          <a:prstGeom prst="rect">
+            <a:avLst/>
+          </a:prstGeom>
+          <a:solidFill>
+            <a:srgbClr val="B45309"/>
+          </a:solidFill>
+          <a:ln w="12700">
+            <a:solidFill>
+              <a:srgbClr val="B45309"/>
+            </a:solidFill>
+            <a:prstDash val="solid"/>
+          </a:ln>
+        </p:spPr>
+      </p:sp>
+      <p:pic>
+        <p:nvPicPr>
+          <p:cNvPr id="20" name="Image 0" descr="preencoded.png">    </p:cNvPr>
+          <p:cNvPicPr>
+            <a:picLocks noChangeAspect="1"/>
+          </p:cNvPicPr>
+          <p:nvPr/>
+        </p:nvPicPr>
+        <p:blipFill>
+          <a:blip r:embed="rId1"/>
+          <a:stretch>
+            <a:fillRect/>
+          </a:stretch>
+        </p:blipFill>
+        <p:spPr>
+          <a:xfrm>
+            <a:off x="8003616" y="128016"/>
+            <a:ext cx="201168" cy="201168"/>
+          </a:xfrm>
+          <a:prstGeom prst="rect">
+            <a:avLst/>
+          </a:prstGeom>
+        </p:spPr>
+      </p:pic>
+      <p:sp>
+        <p:nvSpPr>
+          <p:cNvPr id="21" name="Text 18"/>
+          <p:cNvSpPr txBox="1"/>
+          <p:nvPr/>
+        </p:nvSpPr>
+        <p:spPr>
+          <a:xfrm>
+            <a:off x="8259648" y="91440"/>
+            <a:ext cx="3346831" cy="274320"/>
+          </a:xfrm>
+          <a:prstGeom prst="rect">
+            <a:avLst/>
+          </a:prstGeom>
+          <a:noFill/>
+          <a:ln/>
+        </p:spPr>
+        <p:txBody>
+          <a:bodyPr wrap="square" lIns="0" tIns="0" rIns="0" bIns="0" rtlCol="0" anchor="ctr"/>
+          <a:lstStyle/>
+          <a:p>
+            <a:pPr indent="0" marL="0">
+              <a:buNone/>
+            </a:pPr>
+            <a:r>
+              <a:rPr lang="en-US" sz="1100" b="1" dirty="0">
+                <a:solidFill>
+                  <a:srgbClr val="92400E"/>
+                </a:solidFill>
+                <a:latin typeface="Calibri" pitchFamily="34" charset="0"/>
+                <a:ea typeface="Calibri" pitchFamily="34" charset="-122"/>
+                <a:cs typeface="Calibri" pitchFamily="34" charset="-120"/>
+              </a:rPr>
+              <a:t>DA UTILIZZARE OGGI</a:t>
+            </a:r>
+            <a:pPr indent="0" marL="0">
+              <a:buNone/>
+            </a:pPr>
+            <a:r>
+              <a:rPr lang="en-US" sz="1100" dirty="0">
+                <a:solidFill>
+                  <a:srgbClr val="92400E"/>
+                </a:solidFill>
+                <a:latin typeface="Calibri" pitchFamily="34" charset="0"/>
+                <a:ea typeface="Calibri" pitchFamily="34" charset="-122"/>
+                <a:cs typeface="Calibri" pitchFamily="34" charset="-120"/>
+              </a:rPr>
+              <a:t> · gli strumenti di PRG32</a:t>
             </a:r>
             <a:endParaRPr lang="en-US" sz="1100" dirty="0"/>
           </a:p>
@@ -7101,6 +7984,158 @@
       </p:graphicFrame>
       <p:sp>
         <p:nvSpPr>
+          <p:cNvPr id="4" name="Shape 1"/>
+          <p:cNvSpPr/>
+          <p:nvPr/>
+        </p:nvSpPr>
+        <p:spPr>
+          <a:xfrm>
+            <a:off x="7875600" y="91440"/>
+            <a:ext cx="3767455" cy="274320"/>
+          </a:xfrm>
+          <a:prstGeom prst="rect">
+            <a:avLst/>
+          </a:prstGeom>
+          <a:solidFill>
+            <a:srgbClr val="FEF3C7"/>
+          </a:solidFill>
+          <a:ln w="12700">
+            <a:solidFill>
+              <a:srgbClr val="B45309"/>
+            </a:solidFill>
+            <a:prstDash val="solid"/>
+          </a:ln>
+        </p:spPr>
+      </p:sp>
+      <p:sp>
+        <p:nvSpPr>
+          <p:cNvPr id="5" name="Shape 2"/>
+          <p:cNvSpPr/>
+          <p:nvPr/>
+        </p:nvSpPr>
+        <p:spPr>
+          <a:xfrm>
+            <a:off x="7875600" y="91440"/>
+            <a:ext cx="27432" cy="274320"/>
+          </a:xfrm>
+          <a:prstGeom prst="rect">
+            <a:avLst/>
+          </a:prstGeom>
+          <a:solidFill>
+            <a:srgbClr val="B45309"/>
+          </a:solidFill>
+          <a:ln w="12700">
+            <a:solidFill>
+              <a:srgbClr val="B45309"/>
+            </a:solidFill>
+            <a:prstDash val="solid"/>
+          </a:ln>
+        </p:spPr>
+      </p:sp>
+      <p:sp>
+        <p:nvSpPr>
+          <p:cNvPr id="6" name="Shape 3"/>
+          <p:cNvSpPr/>
+          <p:nvPr/>
+        </p:nvSpPr>
+        <p:spPr>
+          <a:xfrm>
+            <a:off x="7930464" y="91440"/>
+            <a:ext cx="27432" cy="274320"/>
+          </a:xfrm>
+          <a:prstGeom prst="rect">
+            <a:avLst/>
+          </a:prstGeom>
+          <a:solidFill>
+            <a:srgbClr val="B45309"/>
+          </a:solidFill>
+          <a:ln w="12700">
+            <a:solidFill>
+              <a:srgbClr val="B45309"/>
+            </a:solidFill>
+            <a:prstDash val="solid"/>
+          </a:ln>
+        </p:spPr>
+      </p:sp>
+      <p:pic>
+        <p:nvPicPr>
+          <p:cNvPr id="7" name="Image 0" descr="preencoded.png">    </p:cNvPr>
+          <p:cNvPicPr>
+            <a:picLocks noChangeAspect="1"/>
+          </p:cNvPicPr>
+          <p:nvPr/>
+        </p:nvPicPr>
+        <p:blipFill>
+          <a:blip r:embed="rId1"/>
+          <a:stretch>
+            <a:fillRect/>
+          </a:stretch>
+        </p:blipFill>
+        <p:spPr>
+          <a:xfrm>
+            <a:off x="8003616" y="128016"/>
+            <a:ext cx="201168" cy="201168"/>
+          </a:xfrm>
+          <a:prstGeom prst="rect">
+            <a:avLst/>
+          </a:prstGeom>
+        </p:spPr>
+      </p:pic>
+      <p:sp>
+        <p:nvSpPr>
+          <p:cNvPr id="8" name="Text 4"/>
+          <p:cNvSpPr txBox="1"/>
+          <p:nvPr/>
+        </p:nvSpPr>
+        <p:spPr>
+          <a:xfrm>
+            <a:off x="8259648" y="91440"/>
+            <a:ext cx="3346831" cy="274320"/>
+          </a:xfrm>
+          <a:prstGeom prst="rect">
+            <a:avLst/>
+          </a:prstGeom>
+          <a:noFill/>
+          <a:ln/>
+        </p:spPr>
+        <p:txBody>
+          <a:bodyPr wrap="square" lIns="0" tIns="0" rIns="0" bIns="0" rtlCol="0" anchor="ctr"/>
+          <a:lstStyle/>
+          <a:p>
+            <a:pPr indent="0" marL="0">
+              <a:buNone/>
+            </a:pPr>
+            <a:r>
+              <a:rPr lang="en-US" sz="1100" b="1" dirty="0">
+                <a:solidFill>
+                  <a:srgbClr val="92400E"/>
+                </a:solidFill>
+                <a:latin typeface="Calibri" pitchFamily="34" charset="0"/>
+                <a:ea typeface="Calibri" pitchFamily="34" charset="-122"/>
+                <a:cs typeface="Calibri" pitchFamily="34" charset="-120"/>
+              </a:rPr>
+              <a:t>DA UTILIZZARE OGGI</a:t>
+            </a:r>
+            <a:pPr indent="0" marL="0">
+              <a:buNone/>
+            </a:pPr>
+            <a:r>
+              <a:rPr lang="en-US" sz="1100" dirty="0">
+                <a:solidFill>
+                  <a:srgbClr val="92400E"/>
+                </a:solidFill>
+                <a:latin typeface="Calibri" pitchFamily="34" charset="0"/>
+                <a:ea typeface="Calibri" pitchFamily="34" charset="-122"/>
+                <a:cs typeface="Calibri" pitchFamily="34" charset="-120"/>
+              </a:rPr>
+              <a:t> · gli strumenti di PRG32</a:t>
+            </a:r>
+            <a:endParaRPr lang="en-US" sz="1100" dirty="0"/>
+          </a:p>
+        </p:txBody>
+      </p:sp>
+      <p:sp>
+        <p:nvSpPr>
           <p:cNvPr id="25" name="Slide Number Placeholder 0"/>
           <p:cNvSpPr>
             <a:spLocks noGrp="1"/>
@@ -9241,6 +10276,133 @@
               <a:t>Perché RISC-V è fatto così? Per rispondere serve un modello del processore</a:t>
             </a:r>
             <a:endParaRPr lang="en-US" sz="1500" dirty="0"/>
+          </a:p>
+        </p:txBody>
+      </p:sp>
+      <p:sp>
+        <p:nvSpPr>
+          <p:cNvPr id="17" name="Shape 15"/>
+          <p:cNvSpPr/>
+          <p:nvPr/>
+        </p:nvSpPr>
+        <p:spPr>
+          <a:xfrm>
+            <a:off x="7395032" y="91440"/>
+            <a:ext cx="4248023" cy="274320"/>
+          </a:xfrm>
+          <a:prstGeom prst="rect">
+            <a:avLst/>
+          </a:prstGeom>
+          <a:solidFill>
+            <a:srgbClr val="E0F2FE"/>
+          </a:solidFill>
+          <a:ln w="12700">
+            <a:solidFill>
+              <a:srgbClr val="0369A1"/>
+            </a:solidFill>
+            <a:prstDash val="solid"/>
+          </a:ln>
+        </p:spPr>
+      </p:sp>
+      <p:sp>
+        <p:nvSpPr>
+          <p:cNvPr id="18" name="Shape 16"/>
+          <p:cNvSpPr/>
+          <p:nvPr/>
+        </p:nvSpPr>
+        <p:spPr>
+          <a:xfrm>
+            <a:off x="7395032" y="91440"/>
+            <a:ext cx="73152" cy="274320"/>
+          </a:xfrm>
+          <a:prstGeom prst="rect">
+            <a:avLst/>
+          </a:prstGeom>
+          <a:solidFill>
+            <a:srgbClr val="0369A1"/>
+          </a:solidFill>
+          <a:ln w="12700">
+            <a:solidFill>
+              <a:srgbClr val="0369A1"/>
+            </a:solidFill>
+            <a:prstDash val="solid"/>
+          </a:ln>
+        </p:spPr>
+      </p:sp>
+      <p:pic>
+        <p:nvPicPr>
+          <p:cNvPr id="19" name="Image 0" descr="preencoded.png">    </p:cNvPr>
+          <p:cNvPicPr>
+            <a:picLocks noChangeAspect="1"/>
+          </p:cNvPicPr>
+          <p:nvPr/>
+        </p:nvPicPr>
+        <p:blipFill>
+          <a:blip r:embed="rId1"/>
+          <a:stretch>
+            <a:fillRect/>
+          </a:stretch>
+        </p:blipFill>
+        <p:spPr>
+          <a:xfrm>
+            <a:off x="7523048" y="128016"/>
+            <a:ext cx="201168" cy="201168"/>
+          </a:xfrm>
+          <a:prstGeom prst="rect">
+            <a:avLst/>
+          </a:prstGeom>
+        </p:spPr>
+      </p:pic>
+      <p:sp>
+        <p:nvSpPr>
+          <p:cNvPr id="20" name="Text 17"/>
+          <p:cNvSpPr txBox="1"/>
+          <p:nvPr/>
+        </p:nvSpPr>
+        <p:spPr>
+          <a:xfrm>
+            <a:off x="7779080" y="91440"/>
+            <a:ext cx="3827399" cy="274320"/>
+          </a:xfrm>
+          <a:prstGeom prst="rect">
+            <a:avLst/>
+          </a:prstGeom>
+          <a:noFill/>
+          <a:ln/>
+        </p:spPr>
+        <p:txBody>
+          <a:bodyPr wrap="square" lIns="0" tIns="0" rIns="0" bIns="0" rtlCol="0" anchor="ctr"/>
+          <a:lstStyle/>
+          <a:p>
+            <a:pPr indent="0" marL="0">
+              <a:buNone/>
+            </a:pPr>
+            <a:r>
+              <a:rPr lang="en-US" sz="1100" b="1" dirty="0">
+                <a:solidFill>
+                  <a:srgbClr val="075985"/>
+                </a:solidFill>
+                <a:latin typeface="Calibri" pitchFamily="34" charset="0"/>
+                <a:ea typeface="Calibri" pitchFamily="34" charset="-122"/>
+                <a:cs typeface="Calibri" pitchFamily="34" charset="-120"/>
+              </a:rPr>
+              <a:t>DA COMPRENDERE OGGI</a:t>
+            </a:r>
+            <a:pPr indent="0" marL="0">
+              <a:buNone/>
+            </a:pPr>
+            <a:r>
+              <a:rPr lang="en-US" sz="1100" dirty="0">
+                <a:solidFill>
+                  <a:srgbClr val="075985"/>
+                </a:solidFill>
+                <a:latin typeface="Calibri" pitchFamily="34" charset="0"/>
+                <a:ea typeface="Calibri" pitchFamily="34" charset="-122"/>
+                <a:cs typeface="Calibri" pitchFamily="34" charset="-120"/>
+              </a:rPr>
+              <a:t> · accumulatore, pila, registri</a:t>
+            </a:r>
+            <a:endParaRPr lang="en-US" sz="1100" dirty="0"/>
           </a:p>
         </p:txBody>
       </p:sp>
@@ -10653,6 +11815,133 @@
           </a:graphicData>
         </a:graphic>
       </p:graphicFrame>
+      <p:sp>
+        <p:nvSpPr>
+          <p:cNvPr id="18" name="Shape 15"/>
+          <p:cNvSpPr/>
+          <p:nvPr/>
+        </p:nvSpPr>
+        <p:spPr>
+          <a:xfrm>
+            <a:off x="8773871" y="91440"/>
+            <a:ext cx="2869184" cy="274320"/>
+          </a:xfrm>
+          <a:prstGeom prst="rect">
+            <a:avLst/>
+          </a:prstGeom>
+          <a:solidFill>
+            <a:srgbClr val="E0F2FE"/>
+          </a:solidFill>
+          <a:ln w="12700">
+            <a:solidFill>
+              <a:srgbClr val="0369A1"/>
+            </a:solidFill>
+            <a:prstDash val="solid"/>
+          </a:ln>
+        </p:spPr>
+      </p:sp>
+      <p:sp>
+        <p:nvSpPr>
+          <p:cNvPr id="19" name="Shape 16"/>
+          <p:cNvSpPr/>
+          <p:nvPr/>
+        </p:nvSpPr>
+        <p:spPr>
+          <a:xfrm>
+            <a:off x="8773871" y="91440"/>
+            <a:ext cx="73152" cy="274320"/>
+          </a:xfrm>
+          <a:prstGeom prst="rect">
+            <a:avLst/>
+          </a:prstGeom>
+          <a:solidFill>
+            <a:srgbClr val="0369A1"/>
+          </a:solidFill>
+          <a:ln w="12700">
+            <a:solidFill>
+              <a:srgbClr val="0369A1"/>
+            </a:solidFill>
+            <a:prstDash val="solid"/>
+          </a:ln>
+        </p:spPr>
+      </p:sp>
+      <p:pic>
+        <p:nvPicPr>
+          <p:cNvPr id="20" name="Image 0" descr="preencoded.png">    </p:cNvPr>
+          <p:cNvPicPr>
+            <a:picLocks noChangeAspect="1"/>
+          </p:cNvPicPr>
+          <p:nvPr/>
+        </p:nvPicPr>
+        <p:blipFill>
+          <a:blip r:embed="rId1"/>
+          <a:stretch>
+            <a:fillRect/>
+          </a:stretch>
+        </p:blipFill>
+        <p:spPr>
+          <a:xfrm>
+            <a:off x="8901887" y="128016"/>
+            <a:ext cx="201168" cy="201168"/>
+          </a:xfrm>
+          <a:prstGeom prst="rect">
+            <a:avLst/>
+          </a:prstGeom>
+        </p:spPr>
+      </p:pic>
+      <p:sp>
+        <p:nvSpPr>
+          <p:cNvPr id="21" name="Text 17"/>
+          <p:cNvSpPr txBox="1"/>
+          <p:nvPr/>
+        </p:nvSpPr>
+        <p:spPr>
+          <a:xfrm>
+            <a:off x="9157919" y="91440"/>
+            <a:ext cx="2448560" cy="274320"/>
+          </a:xfrm>
+          <a:prstGeom prst="rect">
+            <a:avLst/>
+          </a:prstGeom>
+          <a:noFill/>
+          <a:ln/>
+        </p:spPr>
+        <p:txBody>
+          <a:bodyPr wrap="square" lIns="0" tIns="0" rIns="0" bIns="0" rtlCol="0" anchor="ctr"/>
+          <a:lstStyle/>
+          <a:p>
+            <a:pPr indent="0" marL="0">
+              <a:buNone/>
+            </a:pPr>
+            <a:r>
+              <a:rPr lang="en-US" sz="1100" b="1" dirty="0">
+                <a:solidFill>
+                  <a:srgbClr val="075985"/>
+                </a:solidFill>
+                <a:latin typeface="Calibri" pitchFamily="34" charset="0"/>
+                <a:ea typeface="Calibri" pitchFamily="34" charset="-122"/>
+                <a:cs typeface="Calibri" pitchFamily="34" charset="-120"/>
+              </a:rPr>
+              <a:t>DA COMPRENDERE OGGI</a:t>
+            </a:r>
+            <a:pPr indent="0" marL="0">
+              <a:buNone/>
+            </a:pPr>
+            <a:r>
+              <a:rPr lang="en-US" sz="1100" dirty="0">
+                <a:solidFill>
+                  <a:srgbClr val="075985"/>
+                </a:solidFill>
+                <a:latin typeface="Calibri" pitchFamily="34" charset="0"/>
+                <a:ea typeface="Calibri" pitchFamily="34" charset="-122"/>
+                <a:cs typeface="Calibri" pitchFamily="34" charset="-120"/>
+              </a:rPr>
+              <a:t> · la pila</a:t>
+            </a:r>
+            <a:endParaRPr lang="en-US" sz="1100" dirty="0"/>
+          </a:p>
+        </p:txBody>
+      </p:sp>
       <p:sp>
         <p:nvSpPr>
           <p:cNvPr id="25" name="Slide Number Placeholder 0"/>
@@ -12171,6 +13460,133 @@
       </p:graphicFrame>
       <p:sp>
         <p:nvSpPr>
+          <p:cNvPr id="4" name="Shape 1"/>
+          <p:cNvSpPr/>
+          <p:nvPr/>
+        </p:nvSpPr>
+        <p:spPr>
+          <a:xfrm>
+            <a:off x="7395032" y="91440"/>
+            <a:ext cx="4248023" cy="274320"/>
+          </a:xfrm>
+          <a:prstGeom prst="rect">
+            <a:avLst/>
+          </a:prstGeom>
+          <a:solidFill>
+            <a:srgbClr val="E0F2FE"/>
+          </a:solidFill>
+          <a:ln w="12700">
+            <a:solidFill>
+              <a:srgbClr val="0369A1"/>
+            </a:solidFill>
+            <a:prstDash val="solid"/>
+          </a:ln>
+        </p:spPr>
+      </p:sp>
+      <p:sp>
+        <p:nvSpPr>
+          <p:cNvPr id="5" name="Shape 2"/>
+          <p:cNvSpPr/>
+          <p:nvPr/>
+        </p:nvSpPr>
+        <p:spPr>
+          <a:xfrm>
+            <a:off x="7395032" y="91440"/>
+            <a:ext cx="73152" cy="274320"/>
+          </a:xfrm>
+          <a:prstGeom prst="rect">
+            <a:avLst/>
+          </a:prstGeom>
+          <a:solidFill>
+            <a:srgbClr val="0369A1"/>
+          </a:solidFill>
+          <a:ln w="12700">
+            <a:solidFill>
+              <a:srgbClr val="0369A1"/>
+            </a:solidFill>
+            <a:prstDash val="solid"/>
+          </a:ln>
+        </p:spPr>
+      </p:sp>
+      <p:pic>
+        <p:nvPicPr>
+          <p:cNvPr id="6" name="Image 0" descr="preencoded.png">    </p:cNvPr>
+          <p:cNvPicPr>
+            <a:picLocks noChangeAspect="1"/>
+          </p:cNvPicPr>
+          <p:nvPr/>
+        </p:nvPicPr>
+        <p:blipFill>
+          <a:blip r:embed="rId1"/>
+          <a:stretch>
+            <a:fillRect/>
+          </a:stretch>
+        </p:blipFill>
+        <p:spPr>
+          <a:xfrm>
+            <a:off x="7523048" y="128016"/>
+            <a:ext cx="201168" cy="201168"/>
+          </a:xfrm>
+          <a:prstGeom prst="rect">
+            <a:avLst/>
+          </a:prstGeom>
+        </p:spPr>
+      </p:pic>
+      <p:sp>
+        <p:nvSpPr>
+          <p:cNvPr id="7" name="Text 3"/>
+          <p:cNvSpPr txBox="1"/>
+          <p:nvPr/>
+        </p:nvSpPr>
+        <p:spPr>
+          <a:xfrm>
+            <a:off x="7779080" y="91440"/>
+            <a:ext cx="3827399" cy="274320"/>
+          </a:xfrm>
+          <a:prstGeom prst="rect">
+            <a:avLst/>
+          </a:prstGeom>
+          <a:noFill/>
+          <a:ln/>
+        </p:spPr>
+        <p:txBody>
+          <a:bodyPr wrap="square" lIns="0" tIns="0" rIns="0" bIns="0" rtlCol="0" anchor="ctr"/>
+          <a:lstStyle/>
+          <a:p>
+            <a:pPr indent="0" marL="0">
+              <a:buNone/>
+            </a:pPr>
+            <a:r>
+              <a:rPr lang="en-US" sz="1100" b="1" dirty="0">
+                <a:solidFill>
+                  <a:srgbClr val="075985"/>
+                </a:solidFill>
+                <a:latin typeface="Calibri" pitchFamily="34" charset="0"/>
+                <a:ea typeface="Calibri" pitchFamily="34" charset="-122"/>
+                <a:cs typeface="Calibri" pitchFamily="34" charset="-120"/>
+              </a:rPr>
+              <a:t>DA COMPRENDERE OGGI</a:t>
+            </a:r>
+            <a:pPr indent="0" marL="0">
+              <a:buNone/>
+            </a:pPr>
+            <a:r>
+              <a:rPr lang="en-US" sz="1100" dirty="0">
+                <a:solidFill>
+                  <a:srgbClr val="075985"/>
+                </a:solidFill>
+                <a:latin typeface="Calibri" pitchFamily="34" charset="0"/>
+                <a:ea typeface="Calibri" pitchFamily="34" charset="-122"/>
+                <a:cs typeface="Calibri" pitchFamily="34" charset="-120"/>
+              </a:rPr>
+              <a:t> · accumulatore, pila, registri</a:t>
+            </a:r>
+            <a:endParaRPr lang="en-US" sz="1100" dirty="0"/>
+          </a:p>
+        </p:txBody>
+      </p:sp>
+      <p:sp>
+        <p:nvSpPr>
           <p:cNvPr id="25" name="Slide Number Placeholder 0"/>
           <p:cNvSpPr>
             <a:spLocks noGrp="1"/>
@@ -12674,6 +14090,158 @@
       </p:sp>
       <p:sp>
         <p:nvSpPr>
+          <p:cNvPr id="5" name="Shape 3"/>
+          <p:cNvSpPr/>
+          <p:nvPr/>
+        </p:nvSpPr>
+        <p:spPr>
+          <a:xfrm>
+            <a:off x="7941259" y="91440"/>
+            <a:ext cx="3701796" cy="274320"/>
+          </a:xfrm>
+          <a:prstGeom prst="rect">
+            <a:avLst/>
+          </a:prstGeom>
+          <a:solidFill>
+            <a:srgbClr val="FEF3C7"/>
+          </a:solidFill>
+          <a:ln w="12700">
+            <a:solidFill>
+              <a:srgbClr val="B45309"/>
+            </a:solidFill>
+            <a:prstDash val="solid"/>
+          </a:ln>
+        </p:spPr>
+      </p:sp>
+      <p:sp>
+        <p:nvSpPr>
+          <p:cNvPr id="6" name="Shape 4"/>
+          <p:cNvSpPr/>
+          <p:nvPr/>
+        </p:nvSpPr>
+        <p:spPr>
+          <a:xfrm>
+            <a:off x="7941259" y="91440"/>
+            <a:ext cx="27432" cy="274320"/>
+          </a:xfrm>
+          <a:prstGeom prst="rect">
+            <a:avLst/>
+          </a:prstGeom>
+          <a:solidFill>
+            <a:srgbClr val="B45309"/>
+          </a:solidFill>
+          <a:ln w="12700">
+            <a:solidFill>
+              <a:srgbClr val="B45309"/>
+            </a:solidFill>
+            <a:prstDash val="solid"/>
+          </a:ln>
+        </p:spPr>
+      </p:sp>
+      <p:sp>
+        <p:nvSpPr>
+          <p:cNvPr id="7" name="Shape 5"/>
+          <p:cNvSpPr/>
+          <p:nvPr/>
+        </p:nvSpPr>
+        <p:spPr>
+          <a:xfrm>
+            <a:off x="7996123" y="91440"/>
+            <a:ext cx="27432" cy="274320"/>
+          </a:xfrm>
+          <a:prstGeom prst="rect">
+            <a:avLst/>
+          </a:prstGeom>
+          <a:solidFill>
+            <a:srgbClr val="B45309"/>
+          </a:solidFill>
+          <a:ln w="12700">
+            <a:solidFill>
+              <a:srgbClr val="B45309"/>
+            </a:solidFill>
+            <a:prstDash val="solid"/>
+          </a:ln>
+        </p:spPr>
+      </p:sp>
+      <p:pic>
+        <p:nvPicPr>
+          <p:cNvPr id="8" name="Image 0" descr="preencoded.png">    </p:cNvPr>
+          <p:cNvPicPr>
+            <a:picLocks noChangeAspect="1"/>
+          </p:cNvPicPr>
+          <p:nvPr/>
+        </p:nvPicPr>
+        <p:blipFill>
+          <a:blip r:embed="rId1"/>
+          <a:stretch>
+            <a:fillRect/>
+          </a:stretch>
+        </p:blipFill>
+        <p:spPr>
+          <a:xfrm>
+            <a:off x="8069275" y="128016"/>
+            <a:ext cx="201168" cy="201168"/>
+          </a:xfrm>
+          <a:prstGeom prst="rect">
+            <a:avLst/>
+          </a:prstGeom>
+        </p:spPr>
+      </p:pic>
+      <p:sp>
+        <p:nvSpPr>
+          <p:cNvPr id="9" name="Text 6"/>
+          <p:cNvSpPr txBox="1"/>
+          <p:nvPr/>
+        </p:nvSpPr>
+        <p:spPr>
+          <a:xfrm>
+            <a:off x="8325307" y="91440"/>
+            <a:ext cx="3281172" cy="274320"/>
+          </a:xfrm>
+          <a:prstGeom prst="rect">
+            <a:avLst/>
+          </a:prstGeom>
+          <a:noFill/>
+          <a:ln/>
+        </p:spPr>
+        <p:txBody>
+          <a:bodyPr wrap="square" lIns="0" tIns="0" rIns="0" bIns="0" rtlCol="0" anchor="ctr"/>
+          <a:lstStyle/>
+          <a:p>
+            <a:pPr indent="0" marL="0">
+              <a:buNone/>
+            </a:pPr>
+            <a:r>
+              <a:rPr lang="en-US" sz="1100" b="1" dirty="0">
+                <a:solidFill>
+                  <a:srgbClr val="92400E"/>
+                </a:solidFill>
+                <a:latin typeface="Calibri" pitchFamily="34" charset="0"/>
+                <a:ea typeface="Calibri" pitchFamily="34" charset="-122"/>
+                <a:cs typeface="Calibri" pitchFamily="34" charset="-120"/>
+              </a:rPr>
+              <a:t>DA UTILIZZARE OGGI</a:t>
+            </a:r>
+            <a:pPr indent="0" marL="0">
+              <a:buNone/>
+            </a:pPr>
+            <a:r>
+              <a:rPr lang="en-US" sz="1100" dirty="0">
+                <a:solidFill>
+                  <a:srgbClr val="92400E"/>
+                </a:solidFill>
+                <a:latin typeface="Calibri" pitchFamily="34" charset="0"/>
+                <a:ea typeface="Calibri" pitchFamily="34" charset="-122"/>
+                <a:cs typeface="Calibri" pitchFamily="34" charset="-120"/>
+              </a:rPr>
+              <a:t> · il programma completo</a:t>
+            </a:r>
+            <a:endParaRPr lang="en-US" sz="1100" dirty="0"/>
+          </a:p>
+        </p:txBody>
+      </p:sp>
+      <p:sp>
+        <p:nvSpPr>
           <p:cNvPr id="25" name="Slide Number Placeholder 0"/>
           <p:cNvSpPr>
             <a:spLocks noGrp="1"/>
@@ -13210,6 +14778,158 @@
       </p:sp>
       <p:sp>
         <p:nvSpPr>
+          <p:cNvPr id="5" name="Shape 3"/>
+          <p:cNvSpPr/>
+          <p:nvPr/>
+        </p:nvSpPr>
+        <p:spPr>
+          <a:xfrm>
+            <a:off x="7941259" y="91440"/>
+            <a:ext cx="3701796" cy="274320"/>
+          </a:xfrm>
+          <a:prstGeom prst="rect">
+            <a:avLst/>
+          </a:prstGeom>
+          <a:solidFill>
+            <a:srgbClr val="FEF3C7"/>
+          </a:solidFill>
+          <a:ln w="12700">
+            <a:solidFill>
+              <a:srgbClr val="B45309"/>
+            </a:solidFill>
+            <a:prstDash val="solid"/>
+          </a:ln>
+        </p:spPr>
+      </p:sp>
+      <p:sp>
+        <p:nvSpPr>
+          <p:cNvPr id="6" name="Shape 4"/>
+          <p:cNvSpPr/>
+          <p:nvPr/>
+        </p:nvSpPr>
+        <p:spPr>
+          <a:xfrm>
+            <a:off x="7941259" y="91440"/>
+            <a:ext cx="27432" cy="274320"/>
+          </a:xfrm>
+          <a:prstGeom prst="rect">
+            <a:avLst/>
+          </a:prstGeom>
+          <a:solidFill>
+            <a:srgbClr val="B45309"/>
+          </a:solidFill>
+          <a:ln w="12700">
+            <a:solidFill>
+              <a:srgbClr val="B45309"/>
+            </a:solidFill>
+            <a:prstDash val="solid"/>
+          </a:ln>
+        </p:spPr>
+      </p:sp>
+      <p:sp>
+        <p:nvSpPr>
+          <p:cNvPr id="7" name="Shape 5"/>
+          <p:cNvSpPr/>
+          <p:nvPr/>
+        </p:nvSpPr>
+        <p:spPr>
+          <a:xfrm>
+            <a:off x="7996123" y="91440"/>
+            <a:ext cx="27432" cy="274320"/>
+          </a:xfrm>
+          <a:prstGeom prst="rect">
+            <a:avLst/>
+          </a:prstGeom>
+          <a:solidFill>
+            <a:srgbClr val="B45309"/>
+          </a:solidFill>
+          <a:ln w="12700">
+            <a:solidFill>
+              <a:srgbClr val="B45309"/>
+            </a:solidFill>
+            <a:prstDash val="solid"/>
+          </a:ln>
+        </p:spPr>
+      </p:sp>
+      <p:pic>
+        <p:nvPicPr>
+          <p:cNvPr id="8" name="Image 0" descr="preencoded.png">    </p:cNvPr>
+          <p:cNvPicPr>
+            <a:picLocks noChangeAspect="1"/>
+          </p:cNvPicPr>
+          <p:nvPr/>
+        </p:nvPicPr>
+        <p:blipFill>
+          <a:blip r:embed="rId1"/>
+          <a:stretch>
+            <a:fillRect/>
+          </a:stretch>
+        </p:blipFill>
+        <p:spPr>
+          <a:xfrm>
+            <a:off x="8069275" y="128016"/>
+            <a:ext cx="201168" cy="201168"/>
+          </a:xfrm>
+          <a:prstGeom prst="rect">
+            <a:avLst/>
+          </a:prstGeom>
+        </p:spPr>
+      </p:pic>
+      <p:sp>
+        <p:nvSpPr>
+          <p:cNvPr id="9" name="Text 6"/>
+          <p:cNvSpPr txBox="1"/>
+          <p:nvPr/>
+        </p:nvSpPr>
+        <p:spPr>
+          <a:xfrm>
+            <a:off x="8325307" y="91440"/>
+            <a:ext cx="3281172" cy="274320"/>
+          </a:xfrm>
+          <a:prstGeom prst="rect">
+            <a:avLst/>
+          </a:prstGeom>
+          <a:noFill/>
+          <a:ln/>
+        </p:spPr>
+        <p:txBody>
+          <a:bodyPr wrap="square" lIns="0" tIns="0" rIns="0" bIns="0" rtlCol="0" anchor="ctr"/>
+          <a:lstStyle/>
+          <a:p>
+            <a:pPr indent="0" marL="0">
+              <a:buNone/>
+            </a:pPr>
+            <a:r>
+              <a:rPr lang="en-US" sz="1100" b="1" dirty="0">
+                <a:solidFill>
+                  <a:srgbClr val="92400E"/>
+                </a:solidFill>
+                <a:latin typeface="Calibri" pitchFamily="34" charset="0"/>
+                <a:ea typeface="Calibri" pitchFamily="34" charset="-122"/>
+                <a:cs typeface="Calibri" pitchFamily="34" charset="-120"/>
+              </a:rPr>
+              <a:t>DA UTILIZZARE OGGI</a:t>
+            </a:r>
+            <a:pPr indent="0" marL="0">
+              <a:buNone/>
+            </a:pPr>
+            <a:r>
+              <a:rPr lang="en-US" sz="1100" dirty="0">
+                <a:solidFill>
+                  <a:srgbClr val="92400E"/>
+                </a:solidFill>
+                <a:latin typeface="Calibri" pitchFamily="34" charset="0"/>
+                <a:ea typeface="Calibri" pitchFamily="34" charset="-122"/>
+                <a:cs typeface="Calibri" pitchFamily="34" charset="-120"/>
+              </a:rPr>
+              <a:t> · il programma completo</a:t>
+            </a:r>
+            <a:endParaRPr lang="en-US" sz="1100" dirty="0"/>
+          </a:p>
+        </p:txBody>
+      </p:sp>
+      <p:sp>
+        <p:nvSpPr>
           <p:cNvPr id="25" name="Slide Number Placeholder 0"/>
           <p:cNvSpPr>
             <a:spLocks noGrp="1"/>
@@ -13713,6 +15433,158 @@
       </p:sp>
       <p:sp>
         <p:nvSpPr>
+          <p:cNvPr id="5" name="Shape 3"/>
+          <p:cNvSpPr/>
+          <p:nvPr/>
+        </p:nvSpPr>
+        <p:spPr>
+          <a:xfrm>
+            <a:off x="7941259" y="91440"/>
+            <a:ext cx="3701796" cy="274320"/>
+          </a:xfrm>
+          <a:prstGeom prst="rect">
+            <a:avLst/>
+          </a:prstGeom>
+          <a:solidFill>
+            <a:srgbClr val="FEF3C7"/>
+          </a:solidFill>
+          <a:ln w="12700">
+            <a:solidFill>
+              <a:srgbClr val="B45309"/>
+            </a:solidFill>
+            <a:prstDash val="solid"/>
+          </a:ln>
+        </p:spPr>
+      </p:sp>
+      <p:sp>
+        <p:nvSpPr>
+          <p:cNvPr id="6" name="Shape 4"/>
+          <p:cNvSpPr/>
+          <p:nvPr/>
+        </p:nvSpPr>
+        <p:spPr>
+          <a:xfrm>
+            <a:off x="7941259" y="91440"/>
+            <a:ext cx="27432" cy="274320"/>
+          </a:xfrm>
+          <a:prstGeom prst="rect">
+            <a:avLst/>
+          </a:prstGeom>
+          <a:solidFill>
+            <a:srgbClr val="B45309"/>
+          </a:solidFill>
+          <a:ln w="12700">
+            <a:solidFill>
+              <a:srgbClr val="B45309"/>
+            </a:solidFill>
+            <a:prstDash val="solid"/>
+          </a:ln>
+        </p:spPr>
+      </p:sp>
+      <p:sp>
+        <p:nvSpPr>
+          <p:cNvPr id="7" name="Shape 5"/>
+          <p:cNvSpPr/>
+          <p:nvPr/>
+        </p:nvSpPr>
+        <p:spPr>
+          <a:xfrm>
+            <a:off x="7996123" y="91440"/>
+            <a:ext cx="27432" cy="274320"/>
+          </a:xfrm>
+          <a:prstGeom prst="rect">
+            <a:avLst/>
+          </a:prstGeom>
+          <a:solidFill>
+            <a:srgbClr val="B45309"/>
+          </a:solidFill>
+          <a:ln w="12700">
+            <a:solidFill>
+              <a:srgbClr val="B45309"/>
+            </a:solidFill>
+            <a:prstDash val="solid"/>
+          </a:ln>
+        </p:spPr>
+      </p:sp>
+      <p:pic>
+        <p:nvPicPr>
+          <p:cNvPr id="8" name="Image 0" descr="preencoded.png">    </p:cNvPr>
+          <p:cNvPicPr>
+            <a:picLocks noChangeAspect="1"/>
+          </p:cNvPicPr>
+          <p:nvPr/>
+        </p:nvPicPr>
+        <p:blipFill>
+          <a:blip r:embed="rId1"/>
+          <a:stretch>
+            <a:fillRect/>
+          </a:stretch>
+        </p:blipFill>
+        <p:spPr>
+          <a:xfrm>
+            <a:off x="8069275" y="128016"/>
+            <a:ext cx="201168" cy="201168"/>
+          </a:xfrm>
+          <a:prstGeom prst="rect">
+            <a:avLst/>
+          </a:prstGeom>
+        </p:spPr>
+      </p:pic>
+      <p:sp>
+        <p:nvSpPr>
+          <p:cNvPr id="9" name="Text 6"/>
+          <p:cNvSpPr txBox="1"/>
+          <p:nvPr/>
+        </p:nvSpPr>
+        <p:spPr>
+          <a:xfrm>
+            <a:off x="8325307" y="91440"/>
+            <a:ext cx="3281172" cy="274320"/>
+          </a:xfrm>
+          <a:prstGeom prst="rect">
+            <a:avLst/>
+          </a:prstGeom>
+          <a:noFill/>
+          <a:ln/>
+        </p:spPr>
+        <p:txBody>
+          <a:bodyPr wrap="square" lIns="0" tIns="0" rIns="0" bIns="0" rtlCol="0" anchor="ctr"/>
+          <a:lstStyle/>
+          <a:p>
+            <a:pPr indent="0" marL="0">
+              <a:buNone/>
+            </a:pPr>
+            <a:r>
+              <a:rPr lang="en-US" sz="1100" b="1" dirty="0">
+                <a:solidFill>
+                  <a:srgbClr val="92400E"/>
+                </a:solidFill>
+                <a:latin typeface="Calibri" pitchFamily="34" charset="0"/>
+                <a:ea typeface="Calibri" pitchFamily="34" charset="-122"/>
+                <a:cs typeface="Calibri" pitchFamily="34" charset="-120"/>
+              </a:rPr>
+              <a:t>DA UTILIZZARE OGGI</a:t>
+            </a:r>
+            <a:pPr indent="0" marL="0">
+              <a:buNone/>
+            </a:pPr>
+            <a:r>
+              <a:rPr lang="en-US" sz="1100" dirty="0">
+                <a:solidFill>
+                  <a:srgbClr val="92400E"/>
+                </a:solidFill>
+                <a:latin typeface="Calibri" pitchFamily="34" charset="0"/>
+                <a:ea typeface="Calibri" pitchFamily="34" charset="-122"/>
+                <a:cs typeface="Calibri" pitchFamily="34" charset="-120"/>
+              </a:rPr>
+              <a:t> · il programma completo</a:t>
+            </a:r>
+            <a:endParaRPr lang="en-US" sz="1100" dirty="0"/>
+          </a:p>
+        </p:txBody>
+      </p:sp>
+      <p:sp>
+        <p:nvSpPr>
           <p:cNvPr id="25" name="Slide Number Placeholder 0"/>
           <p:cNvSpPr>
             <a:spLocks noGrp="1"/>
@@ -13939,6 +15811,158 @@
               <a:t>z: .word 0</a:t>
             </a:r>
             <a:endParaRPr lang="en-US" sz="1800" dirty="0"/>
+          </a:p>
+        </p:txBody>
+      </p:sp>
+      <p:sp>
+        <p:nvSpPr>
+          <p:cNvPr id="5" name="Shape 3"/>
+          <p:cNvSpPr/>
+          <p:nvPr/>
+        </p:nvSpPr>
+        <p:spPr>
+          <a:xfrm>
+            <a:off x="7941259" y="91440"/>
+            <a:ext cx="3701796" cy="274320"/>
+          </a:xfrm>
+          <a:prstGeom prst="rect">
+            <a:avLst/>
+          </a:prstGeom>
+          <a:solidFill>
+            <a:srgbClr val="FEF3C7"/>
+          </a:solidFill>
+          <a:ln w="12700">
+            <a:solidFill>
+              <a:srgbClr val="B45309"/>
+            </a:solidFill>
+            <a:prstDash val="solid"/>
+          </a:ln>
+        </p:spPr>
+      </p:sp>
+      <p:sp>
+        <p:nvSpPr>
+          <p:cNvPr id="6" name="Shape 4"/>
+          <p:cNvSpPr/>
+          <p:nvPr/>
+        </p:nvSpPr>
+        <p:spPr>
+          <a:xfrm>
+            <a:off x="7941259" y="91440"/>
+            <a:ext cx="27432" cy="274320"/>
+          </a:xfrm>
+          <a:prstGeom prst="rect">
+            <a:avLst/>
+          </a:prstGeom>
+          <a:solidFill>
+            <a:srgbClr val="B45309"/>
+          </a:solidFill>
+          <a:ln w="12700">
+            <a:solidFill>
+              <a:srgbClr val="B45309"/>
+            </a:solidFill>
+            <a:prstDash val="solid"/>
+          </a:ln>
+        </p:spPr>
+      </p:sp>
+      <p:sp>
+        <p:nvSpPr>
+          <p:cNvPr id="7" name="Shape 5"/>
+          <p:cNvSpPr/>
+          <p:nvPr/>
+        </p:nvSpPr>
+        <p:spPr>
+          <a:xfrm>
+            <a:off x="7996123" y="91440"/>
+            <a:ext cx="27432" cy="274320"/>
+          </a:xfrm>
+          <a:prstGeom prst="rect">
+            <a:avLst/>
+          </a:prstGeom>
+          <a:solidFill>
+            <a:srgbClr val="B45309"/>
+          </a:solidFill>
+          <a:ln w="12700">
+            <a:solidFill>
+              <a:srgbClr val="B45309"/>
+            </a:solidFill>
+            <a:prstDash val="solid"/>
+          </a:ln>
+        </p:spPr>
+      </p:sp>
+      <p:pic>
+        <p:nvPicPr>
+          <p:cNvPr id="8" name="Image 0" descr="preencoded.png">    </p:cNvPr>
+          <p:cNvPicPr>
+            <a:picLocks noChangeAspect="1"/>
+          </p:cNvPicPr>
+          <p:nvPr/>
+        </p:nvPicPr>
+        <p:blipFill>
+          <a:blip r:embed="rId1"/>
+          <a:stretch>
+            <a:fillRect/>
+          </a:stretch>
+        </p:blipFill>
+        <p:spPr>
+          <a:xfrm>
+            <a:off x="8069275" y="128016"/>
+            <a:ext cx="201168" cy="201168"/>
+          </a:xfrm>
+          <a:prstGeom prst="rect">
+            <a:avLst/>
+          </a:prstGeom>
+        </p:spPr>
+      </p:pic>
+      <p:sp>
+        <p:nvSpPr>
+          <p:cNvPr id="9" name="Text 6"/>
+          <p:cNvSpPr txBox="1"/>
+          <p:nvPr/>
+        </p:nvSpPr>
+        <p:spPr>
+          <a:xfrm>
+            <a:off x="8325307" y="91440"/>
+            <a:ext cx="3281172" cy="274320"/>
+          </a:xfrm>
+          <a:prstGeom prst="rect">
+            <a:avLst/>
+          </a:prstGeom>
+          <a:noFill/>
+          <a:ln/>
+        </p:spPr>
+        <p:txBody>
+          <a:bodyPr wrap="square" lIns="0" tIns="0" rIns="0" bIns="0" rtlCol="0" anchor="ctr"/>
+          <a:lstStyle/>
+          <a:p>
+            <a:pPr indent="0" marL="0">
+              <a:buNone/>
+            </a:pPr>
+            <a:r>
+              <a:rPr lang="en-US" sz="1100" b="1" dirty="0">
+                <a:solidFill>
+                  <a:srgbClr val="92400E"/>
+                </a:solidFill>
+                <a:latin typeface="Calibri" pitchFamily="34" charset="0"/>
+                <a:ea typeface="Calibri" pitchFamily="34" charset="-122"/>
+                <a:cs typeface="Calibri" pitchFamily="34" charset="-120"/>
+              </a:rPr>
+              <a:t>DA UTILIZZARE OGGI</a:t>
+            </a:r>
+            <a:pPr indent="0" marL="0">
+              <a:buNone/>
+            </a:pPr>
+            <a:r>
+              <a:rPr lang="en-US" sz="1100" dirty="0">
+                <a:solidFill>
+                  <a:srgbClr val="92400E"/>
+                </a:solidFill>
+                <a:latin typeface="Calibri" pitchFamily="34" charset="0"/>
+                <a:ea typeface="Calibri" pitchFamily="34" charset="-122"/>
+                <a:cs typeface="Calibri" pitchFamily="34" charset="-120"/>
+              </a:rPr>
+              <a:t> · il programma completo</a:t>
+            </a:r>
+            <a:endParaRPr lang="en-US" sz="1100" dirty="0"/>
           </a:p>
         </p:txBody>
       </p:sp>

--- a/it/slides/18-Architettura_dei_Calcolatori-Processore-Codice.pptx
+++ b/it/slides/18-Architettura_dei_Calcolatori-Processore-Codice.pptx
@@ -121,28 +121,28 @@
   <p:extLst>
     <p:ext uri="{521415D9-36F7-43E2-AB2F-B90AF26B5E84}">
       <p14:sectionLst xmlns:p14="http://schemas.microsoft.com/office/powerpoint/2010/main">
-        <p14:section name="Apertura" id="{98861ad1-de09-f881-d701-55498a20c096}">
+        <p14:section name="Apertura" id="{76e4fc1b-9833-0876-1e2e-e6aff56cd768}">
           <p14:sldIdLst>
             <p14:sldId id="256"/>
             <p14:sldId id="257"/>
           </p14:sldIdLst>
         </p14:section>
-        <p14:section name="Riscaldamento sulla macchina" id="{1666ccdf-dfde-03a0-9b6f-5c7f7b330fa7}">
+        <p14:section name="Riscaldamento sulla macchina" id="{a00571fa-e603-f067-3669-09e0cb535583}">
           <p14:sldIdLst>
             <p14:sldId id="258"/>
           </p14:sldIdLst>
         </p14:section>
-        <p14:section name="Lo stack" id="{e37c5f0b-ef5c-f5f3-96ac-5ed5faf0859e}">
+        <p14:section name="Lo stack" id="{e3426c50-38c5-1cfd-8c26-e931aafae3a5}">
           <p14:sldIdLst>
             <p14:sldId id="259"/>
           </p14:sldIdLst>
         </p14:section>
-        <p14:section name="Modelli di processore" id="{31190c9f-bbf8-c31b-db5a-9e466a936146}">
+        <p14:section name="Modelli di processore" id="{baec33d8-25be-1ba1-0099-8cd18fb74cae}">
           <p14:sldIdLst>
             <p14:sldId id="260"/>
           </p14:sldIdLst>
         </p14:section>
-        <p14:section name="Il programma completo" id="{55dcce45-7b35-5666-6e01-69d66bbc8ef7}">
+        <p14:section name="Il programma completo" id="{a1fd3c91-b8f3-f508-ca67-c8432c7197a4}">
           <p14:sldIdLst>
             <p14:sldId id="261"/>
             <p14:sldId id="262"/>
@@ -150,7 +150,7 @@
             <p14:sldId id="264"/>
           </p14:sldIdLst>
         </p14:section>
-        <p14:section name="Eseguire e provare" id="{d98f09b5-5945-aafb-e4b4-d10dd97da0cd}">
+        <p14:section name="Eseguire e provare" id="{c42323ba-366d-60d7-bd7b-c7a0f2ae7f87}">
           <p14:sldIdLst>
             <p14:sldId id="265"/>
             <p14:sldId id="266"/>
@@ -159,7 +159,7 @@
             <p14:sldId id="269"/>
           </p14:sldIdLst>
         </p14:section>
-        <p14:section name="Esercizi" id="{91298611-06b8-9aff-62a1-732d079e59e2}">
+        <p14:section name="Esercizi" id="{e9b7a96d-c496-fbec-e470-da933dd0d2ef}">
           <p14:sldIdLst>
             <p14:sldId id="270"/>
           </p14:sldIdLst>
